--- a/docs/presentations/jobtv_executive_report.pptx
+++ b/docs/presentations/jobtv_executive_report.pptx
@@ -3739,8 +3739,9 @@
   マイページで連携・解除
 セグメント配信 (/admin/line/broadcast):
   卒年度・業界・職種でフィルタ → Push 送信
-  テキスト / カード / カルーセル / 画像
-  Flex Message プレビュー付きビルダー UI</a:t>
+  テキスト / Flex / カルーセル / 画像 / イメージマップ
+  スケジュール配信・テスト送信・自動リトライ（3回）
+  テンプレート保存・履歴閲覧・パーソナライズ変数</a:t>
             </a:r>
           </a:p>
         </p:txBody>
@@ -3810,7 +3811,7 @@
                 </a:solidFill>
                 <a:latin typeface="メイリオ"/>
               </a:rPr>
-              <a:t>Email:  SendGrid REST API（12 テンプレート）
+              <a:t>Email:  SendGrid REST API（14 テンプレート）
 LINE:   Messaging API Push（連携済み学生向け）
 Slack:  Incoming Webhook（運営アラート）
 Sheets: Sheets API v4（登録・予約データ記録）
@@ -4084,7 +4085,7 @@
                           </a:solidFill>
                           <a:latin typeface="メイリオ"/>
                         </a:rPr>
-                        <a:t>✓→企業</a:t>
+                        <a:t>✓→学生+企業</a:t>
                       </a:r>
                     </a:p>
                   </a:txBody>
@@ -4192,7 +4193,7 @@
                           </a:solidFill>
                           <a:latin typeface="メイリオ"/>
                         </a:rPr>
-                        <a:t>✓→企業</a:t>
+                        <a:t>✓→学生+企業</a:t>
                       </a:r>
                     </a:p>
                   </a:txBody>
@@ -4514,7 +4515,7 @@
                           </a:solidFill>
                           <a:latin typeface="メイリオ"/>
                         </a:rPr>
-                        <a:t>✓</a:t>
+                        <a:t>✓（予約可）</a:t>
                       </a:r>
                     </a:p>
                   </a:txBody>
@@ -6037,14 +6038,14 @@
                 </a:solidFill>
                 <a:latin typeface="メイリオ"/>
               </a:rPr>
-              <a:t>source/
-  └ {landscape|portrait}/{companyId}/videos/{videoId}/original.ext
+              <a:t>companies/{companyId}/videos/{draftId}/original.ext
 transcoded/
   └ {landscape|portrait}/{companyId}/videos/{videoId}/hls/
       ├ original.m3u8（マスター）
       ├ master_1080p.m3u8 / master_720p.m3u8
       └ *.ts（セグメント）
-thumbnails/ / admin/hero-items/</a:t>
+ライフサイクル: 元動画 → 90日後 Glacier アーカイブ
+削除キューで安全な非同期削除</a:t>
             </a:r>
           </a:p>
         </p:txBody>
@@ -8478,7 +8479,7 @@
         </p:nvGraphicFramePr>
         <p:xfrm>
           <a:off x="6217920" y="1554480"/>
-          <a:ext cx="5212080" cy="1737360"/>
+          <a:ext cx="5212080" cy="2084832"/>
         </p:xfrm>
         <a:graphic>
           <a:graphicData uri="http://schemas.openxmlformats.org/drawingml/2006/table">
@@ -8752,7 +8753,7 @@
                           </a:solidFill>
                           <a:latin typeface="メイリオ"/>
                         </a:rPr>
-                        <a:t>/api/cron/*</a:t>
+                        <a:t>/api/studio/login</a:t>
                       </a:r>
                     </a:p>
                   </a:txBody>
@@ -8796,7 +8797,7 @@
                           </a:solidFill>
                           <a:latin typeface="メイリオ"/>
                         </a:rPr>
-                        <a:t>1 req/min per IP</a:t>
+                        <a:t>10 req/min per IP</a:t>
                       </a:r>
                     </a:p>
                   </a:txBody>
@@ -8805,6 +8806,62 @@
                       <a:srgbClr val="F0F2F5"/>
                     </a:solidFill>
                   </a:tcPr>
+                </a:tc>
+              </a:tr>
+              <a:tr h="347472">
+                <a:tc>
+                  <a:txBody>
+                    <a:bodyPr/>
+                    <a:lstStyle/>
+                    <a:p>
+                      <a:r>
+                        <a:rPr sz="1100" b="0">
+                          <a:solidFill>
+                            <a:srgbClr val="2D3A4A"/>
+                          </a:solidFill>
+                          <a:latin typeface="メイリオ"/>
+                        </a:rPr>
+                        <a:t>/api/cron/*</a:t>
+                      </a:r>
+                    </a:p>
+                  </a:txBody>
+                  <a:tcPr anchor="ctr"/>
+                </a:tc>
+                <a:tc>
+                  <a:txBody>
+                    <a:bodyPr/>
+                    <a:lstStyle/>
+                    <a:p>
+                      <a:r>
+                        <a:rPr sz="1100" b="0">
+                          <a:solidFill>
+                            <a:srgbClr val="2D3A4A"/>
+                          </a:solidFill>
+                          <a:latin typeface="メイリオ"/>
+                        </a:rPr>
+                        <a:t>Rate Limit</a:t>
+                      </a:r>
+                    </a:p>
+                  </a:txBody>
+                  <a:tcPr anchor="ctr"/>
+                </a:tc>
+                <a:tc>
+                  <a:txBody>
+                    <a:bodyPr/>
+                    <a:lstStyle/>
+                    <a:p>
+                      <a:r>
+                        <a:rPr sz="1100" b="0">
+                          <a:solidFill>
+                            <a:srgbClr val="2D3A4A"/>
+                          </a:solidFill>
+                          <a:latin typeface="メイリオ"/>
+                        </a:rPr>
+                        <a:t>1 req/min per IP</a:t>
+                      </a:r>
+                    </a:p>
+                  </a:txBody>
+                  <a:tcPr anchor="ctr"/>
                 </a:tc>
               </a:tr>
             </a:tbl>
@@ -10346,7 +10403,7 @@
                 </a:solidFill>
                 <a:latin typeface="メイリオ"/>
               </a:rPr>
-              <a:t>定期処理（Cron）</a:t>
+              <a:t>定期処理（Cron 4本）</a:t>
             </a:r>
           </a:p>
           <a:p>
@@ -10362,9 +10419,9 @@
                 </a:solidFill>
                 <a:latin typeface="メイリオ"/>
               </a:rPr>
-              <a:t>イベントリマインダー: 毎日 JST 10:00
-対象: 7日前 / 3日前 / 1日前
-認証: CRON_SECRET Bearer</a:t>
+              <a:t>リマインダー: 毎日 JST 10:00
+LINE配信: 5分毎 / リトライ: 15分毎
+ストレージ清掃: 毎日 JST 12:00</a:t>
             </a:r>
           </a:p>
         </p:txBody>
@@ -10662,6 +10719,179 @@
             <a:avLst/>
           </a:prstGeom>
           <a:solidFill>
+            <a:srgbClr val="E8F8F5"/>
+          </a:solidFill>
+          <a:ln w="12700">
+            <a:solidFill>
+              <a:srgbClr val="2E86DE"/>
+            </a:solidFill>
+          </a:ln>
+        </p:spPr>
+        <p:style>
+          <a:lnRef idx="1">
+            <a:schemeClr val="accent1"/>
+          </a:lnRef>
+          <a:fillRef idx="3">
+            <a:schemeClr val="accent1"/>
+          </a:fillRef>
+          <a:effectRef idx="2">
+            <a:schemeClr val="accent1"/>
+          </a:effectRef>
+          <a:fontRef idx="minor">
+            <a:schemeClr val="lt1"/>
+          </a:fontRef>
+        </p:style>
+        <p:txBody>
+          <a:bodyPr rtlCol="0" anchor="ctr" wrap="square" lIns="137160" rIns="137160" tIns="91440"/>
+          <a:lstStyle/>
+          <a:p>
+            <a:pPr algn="ctr"/>
+            <a:r>
+              <a:rPr sz="1400" b="1">
+                <a:solidFill>
+                  <a:srgbClr val="27AE60"/>
+                </a:solidFill>
+                <a:latin typeface="メイリオ"/>
+              </a:rPr>
+              <a:t>完了済み ✓</a:t>
+            </a:r>
+          </a:p>
+          <a:p>
+            <a:pPr>
+              <a:spcBef>
+                <a:spcPts val="400"/>
+              </a:spcBef>
+            </a:pPr>
+            <a:r>
+              <a:rPr sz="1100" b="0">
+                <a:solidFill>
+                  <a:srgbClr val="2D3A4A"/>
+                </a:solidFill>
+                <a:latin typeface="メイリオ"/>
+              </a:rPr>
+              <a:t/>
+            </a:r>
+          </a:p>
+        </p:txBody>
+      </p:sp>
+      <p:sp>
+        <p:nvSpPr>
+          <p:cNvPr id="8" name="TextBox 7"/>
+          <p:cNvSpPr txBox="1"/>
+          <p:nvPr/>
+        </p:nvSpPr>
+        <p:spPr>
+          <a:xfrm>
+            <a:off x="914400" y="1645920"/>
+            <a:ext cx="4846320" cy="1371600"/>
+          </a:xfrm>
+          <a:prstGeom prst="rect">
+            <a:avLst/>
+          </a:prstGeom>
+          <a:noFill/>
+        </p:spPr>
+        <p:txBody>
+          <a:bodyPr wrap="square">
+            <a:spAutoFit/>
+          </a:bodyPr>
+          <a:lstStyle/>
+          <a:p>
+            <a:pPr>
+              <a:spcAft>
+                <a:spcPts val="500"/>
+              </a:spcAft>
+            </a:pPr>
+            <a:r>
+              <a:rPr sz="1300" b="0">
+                <a:solidFill>
+                  <a:srgbClr val="2D3A4A"/>
+                </a:solidFill>
+                <a:latin typeface="メイリオ"/>
+              </a:rPr>
+              <a:t>● LINE 配信履歴・ログの DB 記録 → 実装済</a:t>
+            </a:r>
+          </a:p>
+          <a:p>
+            <a:pPr>
+              <a:spcAft>
+                <a:spcPts val="500"/>
+              </a:spcAft>
+            </a:pPr>
+            <a:r>
+              <a:rPr sz="1300" b="0">
+                <a:solidFill>
+                  <a:srgbClr val="2D3A4A"/>
+                </a:solidFill>
+                <a:latin typeface="メイリオ"/>
+              </a:rPr>
+              <a:t>● 学生向け確認メール（エントリー/予約） → 実装済</a:t>
+            </a:r>
+          </a:p>
+          <a:p>
+            <a:pPr>
+              <a:spcAft>
+                <a:spcPts val="500"/>
+              </a:spcAft>
+            </a:pPr>
+            <a:r>
+              <a:rPr sz="1300" b="0">
+                <a:solidFill>
+                  <a:srgbClr val="2D3A4A"/>
+                </a:solidFill>
+                <a:latin typeface="メイリオ"/>
+              </a:rPr>
+              <a:t>● LINE テスト送信・スケジュール配信・自動リトライ → 実装済</a:t>
+            </a:r>
+          </a:p>
+          <a:p>
+            <a:pPr>
+              <a:spcAft>
+                <a:spcPts val="500"/>
+              </a:spcAft>
+            </a:pPr>
+            <a:r>
+              <a:rPr sz="1300" b="0">
+                <a:solidFill>
+                  <a:srgbClr val="2D3A4A"/>
+                </a:solidFill>
+                <a:latin typeface="メイリオ"/>
+              </a:rPr>
+              <a:t>● LINE テンプレート保存・再利用 → 実装済</a:t>
+            </a:r>
+          </a:p>
+          <a:p>
+            <a:pPr>
+              <a:spcAft>
+                <a:spcPts val="500"/>
+              </a:spcAft>
+            </a:pPr>
+            <a:r>
+              <a:rPr sz="1300" b="0">
+                <a:solidFill>
+                  <a:srgbClr val="2D3A4A"/>
+                </a:solidFill>
+                <a:latin typeface="メイリオ"/>
+              </a:rPr>
+              <a:t>● S3 ストレージ管理・削除キュー → 実装済</a:t>
+            </a:r>
+          </a:p>
+        </p:txBody>
+      </p:sp>
+      <p:sp>
+        <p:nvSpPr>
+          <p:cNvPr id="9" name="Rounded Rectangle 8"/>
+          <p:cNvSpPr/>
+          <p:nvPr/>
+        </p:nvSpPr>
+        <p:spPr>
+          <a:xfrm>
+            <a:off x="6217920" y="1188720"/>
+            <a:ext cx="5303520" cy="2011680"/>
+          </a:xfrm>
+          <a:prstGeom prst="roundRect">
+            <a:avLst/>
+          </a:prstGeom>
+          <a:solidFill>
             <a:srgbClr val="FDF2E9"/>
           </a:solidFill>
           <a:ln w="12700">
@@ -10719,13 +10949,13 @@
       </p:sp>
       <p:sp>
         <p:nvSpPr>
-          <p:cNvPr id="8" name="TextBox 7"/>
+          <p:cNvPr id="10" name="TextBox 9"/>
           <p:cNvSpPr txBox="1"/>
           <p:nvPr/>
         </p:nvSpPr>
         <p:spPr>
           <a:xfrm>
-            <a:off x="914400" y="1645920"/>
+            <a:off x="6400800" y="1645920"/>
             <a:ext cx="4846320" cy="1371600"/>
           </a:xfrm>
           <a:prstGeom prst="rect">
@@ -10751,7 +10981,7 @@
                 </a:solidFill>
                 <a:latin typeface="メイリオ"/>
               </a:rPr>
-              <a:t>● LINE 配信履歴・ログの DB 記録</a:t>
+              <a:t>● 通知オプトアウト機能</a:t>
             </a:r>
           </a:p>
           <a:p>
@@ -10767,7 +10997,7 @@
                 </a:solidFill>
                 <a:latin typeface="メイリオ"/>
               </a:rPr>
-              <a:t>● 学生向け確認メール（エントリー/予約）</a:t>
+              <a:t>● 求人エントリー / 説明会の Slack・Sheets 連携</a:t>
             </a:r>
           </a:p>
           <a:p>
@@ -10783,20 +11013,20 @@
                 </a:solidFill>
                 <a:latin typeface="メイリオ"/>
               </a:rPr>
-              <a:t>● LINE テスト送信機能</a:t>
-            </a:r>
-          </a:p>
-        </p:txBody>
-      </p:sp>
-      <p:sp>
-        <p:nvSpPr>
-          <p:cNvPr id="9" name="Rounded Rectangle 8"/>
+              <a:t>● Email / Slack リトライ機構</a:t>
+            </a:r>
+          </a:p>
+        </p:txBody>
+      </p:sp>
+      <p:sp>
+        <p:nvSpPr>
+          <p:cNvPr id="11" name="Rounded Rectangle 10"/>
           <p:cNvSpPr/>
           <p:nvPr/>
         </p:nvSpPr>
         <p:spPr>
           <a:xfrm>
-            <a:off x="6217920" y="1188720"/>
+            <a:off x="731520" y="3474720"/>
             <a:ext cx="5303520" cy="2011680"/>
           </a:xfrm>
           <a:prstGeom prst="roundRect">
@@ -10837,7 +11067,7 @@
                 </a:solidFill>
                 <a:latin typeface="メイリオ"/>
               </a:rPr>
-              <a:t>中優先度</a:t>
+              <a:t>インフラ・信頼性</a:t>
             </a:r>
           </a:p>
           <a:p>
@@ -10860,13 +11090,13 @@
       </p:sp>
       <p:sp>
         <p:nvSpPr>
-          <p:cNvPr id="10" name="TextBox 9"/>
+          <p:cNvPr id="12" name="TextBox 11"/>
           <p:cNvSpPr txBox="1"/>
           <p:nvPr/>
         </p:nvSpPr>
         <p:spPr>
           <a:xfrm>
-            <a:off x="6400800" y="1645920"/>
+            <a:off x="914400" y="3931920"/>
             <a:ext cx="4846320" cy="1371600"/>
           </a:xfrm>
           <a:prstGeom prst="rect">
@@ -10892,7 +11122,7 @@
                 </a:solidFill>
                 <a:latin typeface="メイリオ"/>
               </a:rPr>
-              <a:t>● LINE 配信予約（スケジュール配信）</a:t>
+              <a:t>● Sheets 書き込み失敗の Slack 通知</a:t>
             </a:r>
           </a:p>
           <a:p>
@@ -10908,7 +11138,7 @@
                 </a:solidFill>
                 <a:latin typeface="メイリオ"/>
               </a:rPr>
-              <a:t>● 送信リトライ機構（キュー/バッチ）</a:t>
+              <a:t>● MediaConvert 完了の SNS 通知</a:t>
             </a:r>
           </a:p>
           <a:p>
@@ -10924,148 +11154,7 @@
                 </a:solidFill>
                 <a:latin typeface="メイリオ"/>
               </a:rPr>
-              <a:t>● 通知オプトアウト機能</a:t>
-            </a:r>
-          </a:p>
-        </p:txBody>
-      </p:sp>
-      <p:sp>
-        <p:nvSpPr>
-          <p:cNvPr id="11" name="Rounded Rectangle 10"/>
-          <p:cNvSpPr/>
-          <p:nvPr/>
-        </p:nvSpPr>
-        <p:spPr>
-          <a:xfrm>
-            <a:off x="731520" y="3474720"/>
-            <a:ext cx="5303520" cy="2011680"/>
-          </a:xfrm>
-          <a:prstGeom prst="roundRect">
-            <a:avLst/>
-          </a:prstGeom>
-          <a:solidFill>
-            <a:srgbClr val="E8F8F5"/>
-          </a:solidFill>
-          <a:ln w="12700">
-            <a:solidFill>
-              <a:srgbClr val="2E86DE"/>
-            </a:solidFill>
-          </a:ln>
-        </p:spPr>
-        <p:style>
-          <a:lnRef idx="1">
-            <a:schemeClr val="accent1"/>
-          </a:lnRef>
-          <a:fillRef idx="3">
-            <a:schemeClr val="accent1"/>
-          </a:fillRef>
-          <a:effectRef idx="2">
-            <a:schemeClr val="accent1"/>
-          </a:effectRef>
-          <a:fontRef idx="minor">
-            <a:schemeClr val="lt1"/>
-          </a:fontRef>
-        </p:style>
-        <p:txBody>
-          <a:bodyPr rtlCol="0" anchor="ctr" wrap="square" lIns="137160" rIns="137160" tIns="91440"/>
-          <a:lstStyle/>
-          <a:p>
-            <a:pPr algn="ctr"/>
-            <a:r>
-              <a:rPr sz="1400" b="1">
-                <a:solidFill>
-                  <a:srgbClr val="27AE60"/>
-                </a:solidFill>
-                <a:latin typeface="メイリオ"/>
-              </a:rPr>
-              <a:t>インフラ・信頼性</a:t>
-            </a:r>
-          </a:p>
-          <a:p>
-            <a:pPr>
-              <a:spcBef>
-                <a:spcPts val="400"/>
-              </a:spcBef>
-            </a:pPr>
-            <a:r>
-              <a:rPr sz="1100" b="0">
-                <a:solidFill>
-                  <a:srgbClr val="2D3A4A"/>
-                </a:solidFill>
-                <a:latin typeface="メイリオ"/>
-              </a:rPr>
-              <a:t/>
-            </a:r>
-          </a:p>
-        </p:txBody>
-      </p:sp>
-      <p:sp>
-        <p:nvSpPr>
-          <p:cNvPr id="12" name="TextBox 11"/>
-          <p:cNvSpPr txBox="1"/>
-          <p:nvPr/>
-        </p:nvSpPr>
-        <p:spPr>
-          <a:xfrm>
-            <a:off x="914400" y="3931920"/>
-            <a:ext cx="4846320" cy="1371600"/>
-          </a:xfrm>
-          <a:prstGeom prst="rect">
-            <a:avLst/>
-          </a:prstGeom>
-          <a:noFill/>
-        </p:spPr>
-        <p:txBody>
-          <a:bodyPr wrap="square">
-            <a:spAutoFit/>
-          </a:bodyPr>
-          <a:lstStyle/>
-          <a:p>
-            <a:pPr>
-              <a:spcAft>
-                <a:spcPts val="500"/>
-              </a:spcAft>
-            </a:pPr>
-            <a:r>
-              <a:rPr sz="1300" b="0">
-                <a:solidFill>
-                  <a:srgbClr val="2D3A4A"/>
-                </a:solidFill>
-                <a:latin typeface="メイリオ"/>
-              </a:rPr>
-              <a:t>● 全チャネル共通リトライ機構</a:t>
-            </a:r>
-          </a:p>
-          <a:p>
-            <a:pPr>
-              <a:spcAft>
-                <a:spcPts val="500"/>
-              </a:spcAft>
-            </a:pPr>
-            <a:r>
-              <a:rPr sz="1300" b="0">
-                <a:solidFill>
-                  <a:srgbClr val="2D3A4A"/>
-                </a:solidFill>
-                <a:latin typeface="メイリオ"/>
-              </a:rPr>
-              <a:t>● Sheets 書き込み失敗の検知</a:t>
-            </a:r>
-          </a:p>
-          <a:p>
-            <a:pPr>
-              <a:spcAft>
-                <a:spcPts val="500"/>
-              </a:spcAft>
-            </a:pPr>
-            <a:r>
-              <a:rPr sz="1300" b="0">
-                <a:solidFill>
-                  <a:srgbClr val="2D3A4A"/>
-                </a:solidFill>
-                <a:latin typeface="メイリオ"/>
-              </a:rPr>
-              <a:t>● MediaConvert 完了の SNS 通知</a:t>
+              <a:t>● 分散トレーシング・メトリクス拡充</a:t>
             </a:r>
           </a:p>
         </p:txBody>
@@ -11119,7 +11208,7 @@
                 </a:solidFill>
                 <a:latin typeface="メイリオ"/>
               </a:rPr>
-              <a:t>低優先度</a:t>
+              <a:t>将来検討</a:t>
             </a:r>
           </a:p>
           <a:p>
@@ -11174,7 +11263,7 @@
                 </a:solidFill>
                 <a:latin typeface="メイリオ"/>
               </a:rPr>
-              <a:t>● LINE テンプレート保存・再利用</a:t>
+              <a:t>● LINE A/B テスト配信</a:t>
             </a:r>
           </a:p>
           <a:p>
@@ -11190,7 +11279,7 @@
                 </a:solidFill>
                 <a:latin typeface="メイリオ"/>
               </a:rPr>
-              <a:t>● A/B テスト配信</a:t>
+              <a:t>● LINE Webhook（自動応答）</a:t>
             </a:r>
           </a:p>
           <a:p>
@@ -11206,7 +11295,7 @@
                 </a:solidFill>
                 <a:latin typeface="メイリオ"/>
               </a:rPr>
-              <a:t>● Flex Message JSON 直接編集モード</a:t>
+              <a:t>● 全チャネル共通リトライ・キュー統合</a:t>
             </a:r>
           </a:p>
         </p:txBody>
@@ -14379,7 +14468,8 @@
                 <a:latin typeface="メイリオ"/>
               </a:rPr>
               <a:t>Email / LINE / Slack / Sheets /
-アプリ内通知の 5 チャネル</a:t>
+アプリ内通知の 5 チャネル
+LINE スケジュール配信対応</a:t>
             </a:r>
           </a:p>
         </p:txBody>
@@ -14418,7 +14508,7 @@
                 </a:solidFill>
                 <a:latin typeface="Calibri"/>
               </a:rPr>
-              <a:t>Next.js 16    |    Supabase    |    AWS (S3 / MediaConvert / CloudFront)    |    Vercel    |    TypeScript</a:t>
+              <a:t>Next.js 16    |    Supabase    |    AWS (S3 / MediaConvert / CloudFront)    |    Vercel    |    TypeScript    |    SEO / AIO</a:t>
             </a:r>
           </a:p>
         </p:txBody>
@@ -14694,7 +14784,7 @@
                 </a:solidFill>
                 <a:latin typeface="Calibri"/>
               </a:rPr>
-              <a:t>11</a:t>
+              <a:t>4</a:t>
             </a:r>
           </a:p>
         </p:txBody>
@@ -14733,8 +14823,8 @@
                 </a:solidFill>
                 <a:latin typeface="メイリオ"/>
               </a:rPr>
-              <a:t>セキュリティレイヤー
-DDoS / RLS / MFA / IP制限 / CAPTCHA 等</a:t>
+              <a:t>定期処理（Cron）
+リマインダー / LINE 配信 / リトライ / 清掃</a:t>
             </a:r>
           </a:p>
         </p:txBody>
@@ -15047,7 +15137,7 @@
         </p:nvGraphicFramePr>
         <p:xfrm>
           <a:off x="274320" y="1737360"/>
-          <a:ext cx="11612880" cy="3474720"/>
+          <a:ext cx="11612880" cy="4169664"/>
         </p:xfrm>
         <a:graphic>
           <a:graphicData uri="http://schemas.openxmlformats.org/drawingml/2006/table">
@@ -15467,7 +15557,7 @@
                           </a:solidFill>
                           <a:latin typeface="メイリオ"/>
                         </a:rPr>
-                        <a:t>セグメント条件指定 → テキスト / Flex / 画像の一斉配信</a:t>
+                        <a:t>セグメント配信・スケジュール配信・テスト送信・自動リトライ</a:t>
                       </a:r>
                     </a:p>
                   </a:txBody>
@@ -15513,7 +15603,7 @@
                           </a:solidFill>
                           <a:latin typeface="メイリオ"/>
                         </a:rPr>
-                        <a:t>メール管理</a:t>
+                        <a:t>LINE 管理</a:t>
                       </a:r>
                     </a:p>
                   </a:txBody>
@@ -15531,7 +15621,7 @@
                           </a:solidFill>
                           <a:latin typeface="メイリオ"/>
                         </a:rPr>
-                        <a:t>テンプレート CRUD + 送信ログの閲覧</a:t>
+                        <a:t>配信履歴・テンプレート管理・リッチメニュー</a:t>
                       </a:r>
                     </a:p>
                   </a:txBody>
@@ -15549,7 +15639,131 @@
                           </a:solidFill>
                           <a:latin typeface="メイリオ"/>
                         </a:rPr>
+                        <a:t>/admin/line/history 等</a:t>
+                      </a:r>
+                    </a:p>
+                  </a:txBody>
+                  <a:tcPr anchor="ctr"/>
+                </a:tc>
+              </a:tr>
+              <a:tr h="347472">
+                <a:tc>
+                  <a:txBody>
+                    <a:bodyPr/>
+                    <a:lstStyle/>
+                    <a:p>
+                      <a:r>
+                        <a:rPr sz="1100" b="0">
+                          <a:solidFill>
+                            <a:srgbClr val="2D3A4A"/>
+                          </a:solidFill>
+                          <a:latin typeface="メイリオ"/>
+                        </a:rPr>
+                        <a:t>メール管理</a:t>
+                      </a:r>
+                    </a:p>
+                  </a:txBody>
+                  <a:tcPr anchor="ctr">
+                    <a:solidFill>
+                      <a:srgbClr val="F0F2F5"/>
+                    </a:solidFill>
+                  </a:tcPr>
+                </a:tc>
+                <a:tc>
+                  <a:txBody>
+                    <a:bodyPr/>
+                    <a:lstStyle/>
+                    <a:p>
+                      <a:r>
+                        <a:rPr sz="1100" b="0">
+                          <a:solidFill>
+                            <a:srgbClr val="2D3A4A"/>
+                          </a:solidFill>
+                          <a:latin typeface="メイリオ"/>
+                        </a:rPr>
+                        <a:t>テンプレート CRUD（14種） + 送信ログの閲覧</a:t>
+                      </a:r>
+                    </a:p>
+                  </a:txBody>
+                  <a:tcPr anchor="ctr">
+                    <a:solidFill>
+                      <a:srgbClr val="F0F2F5"/>
+                    </a:solidFill>
+                  </a:tcPr>
+                </a:tc>
+                <a:tc>
+                  <a:txBody>
+                    <a:bodyPr/>
+                    <a:lstStyle/>
+                    <a:p>
+                      <a:r>
+                        <a:rPr sz="1100" b="0">
+                          <a:solidFill>
+                            <a:srgbClr val="2D3A4A"/>
+                          </a:solidFill>
+                          <a:latin typeface="メイリオ"/>
+                        </a:rPr>
                         <a:t>/admin/email/*</a:t>
+                      </a:r>
+                    </a:p>
+                  </a:txBody>
+                  <a:tcPr anchor="ctr">
+                    <a:solidFill>
+                      <a:srgbClr val="F0F2F5"/>
+                    </a:solidFill>
+                  </a:tcPr>
+                </a:tc>
+              </a:tr>
+              <a:tr h="347472">
+                <a:tc>
+                  <a:txBody>
+                    <a:bodyPr/>
+                    <a:lstStyle/>
+                    <a:p>
+                      <a:r>
+                        <a:rPr sz="1100" b="0">
+                          <a:solidFill>
+                            <a:srgbClr val="2D3A4A"/>
+                          </a:solidFill>
+                          <a:latin typeface="メイリオ"/>
+                        </a:rPr>
+                        <a:t>ストレージ</a:t>
+                      </a:r>
+                    </a:p>
+                  </a:txBody>
+                  <a:tcPr anchor="ctr"/>
+                </a:tc>
+                <a:tc>
+                  <a:txBody>
+                    <a:bodyPr/>
+                    <a:lstStyle/>
+                    <a:p>
+                      <a:r>
+                        <a:rPr sz="1100" b="0">
+                          <a:solidFill>
+                            <a:srgbClr val="2D3A4A"/>
+                          </a:solidFill>
+                          <a:latin typeface="メイリオ"/>
+                        </a:rPr>
+                        <a:t>S3 / Supabase Storage の削除キュー管理・孤立ファイル清掃</a:t>
+                      </a:r>
+                    </a:p>
+                  </a:txBody>
+                  <a:tcPr anchor="ctr"/>
+                </a:tc>
+                <a:tc>
+                  <a:txBody>
+                    <a:bodyPr/>
+                    <a:lstStyle/>
+                    <a:p>
+                      <a:r>
+                        <a:rPr sz="1100" b="0">
+                          <a:solidFill>
+                            <a:srgbClr val="2D3A4A"/>
+                          </a:solidFill>
+                          <a:latin typeface="メイリオ"/>
+                        </a:rPr>
+                        <a:t>/admin/storage-cleanup</a:t>
                       </a:r>
                     </a:p>
                   </a:txBody>
@@ -15891,7 +16105,8 @@
                 <a:latin typeface="メイリオ"/>
               </a:rPr>
               <a:t>HLS アダプティブストリーミングで
-あらゆる環境で企業のリアルを伝える</a:t>
+あらゆる環境で企業のリアルを伝える
+SEO / AIO 対応で AI 時代の発見性も確保</a:t>
             </a:r>
           </a:p>
         </p:txBody>
@@ -15960,7 +16175,8 @@
                 <a:latin typeface="メイリオ"/>
               </a:rPr>
               <a:t>Draft/Production + 管理者審査で
-品質を担保しつつ企業の自走を実現</a:t>
+品質を担保しつつ企業の自走を実現
+LINE スケジュール配信・自動リトライ</a:t>
             </a:r>
           </a:p>
         </p:txBody>
@@ -16029,7 +16245,8 @@
                 <a:latin typeface="メイリオ"/>
               </a:rPr>
               <a:t>DDoS / RLS / MFA / IP 制限 /
-CAPTCHA / 監査ログの多層防御</a:t>
+CAPTCHA / 監査ログの多層防御
+S3 削除キューで安全なストレージ管理</a:t>
             </a:r>
           </a:p>
         </p:txBody>
@@ -20205,8 +20422,8 @@
                 </a:solidFill>
                 <a:latin typeface="メイリオ"/>
               </a:rPr>
-              <a:t>動画 50MB
-サムネイル 10MB</a:t>
+              <a:t>動画 500MB（S3 直接）
+サムネイル 5MB</a:t>
             </a:r>
           </a:p>
         </p:txBody>
